--- a/BACKUP&RECOVERY/11장/11장_ARCHIVELOG_복구_CURRENT리두_컨트롤파일.pptx
+++ b/BACKUP&RECOVERY/11장/11장_ARCHIVELOG_복구_CURRENT리두_컨트롤파일.pptx
@@ -6846,7 +6846,7 @@
                 <a:latin typeface="Consolas"/>
                 <a:ea typeface="Consolas"/>
               </a:rPr>
-              <a:t>ORA-01110: data file 1: '/u02/oradata/ORCL/system01.dbf'</a:t>
+              <a:t>ORA-01110: data file 1: '/u01/app/oracle/oradata/orcl/system01.dbf'</a:t>
             </a:r>
           </a:p>
           <a:p>
@@ -6897,7 +6897,7 @@
                 <a:latin typeface="Consolas"/>
                 <a:ea typeface="Consolas"/>
               </a:rPr>
-              <a:t>SYS@orcl&gt; !cp -p /home/oracle/backup/ch11/*.dbf /u02/oradata/ORCL/</a:t>
+              <a:t>SYS@orcl&gt; !cp -p /home/oracle/backup/ch11/*.dbf /u02/oradata/orcl/</a:t>
             </a:r>
           </a:p>
           <a:p>
@@ -8029,7 +8029,7 @@
                 <a:latin typeface="Consolas"/>
                 <a:ea typeface="Consolas"/>
               </a:rPr>
-              <a:t>ORA-00308: cannot open archived log '/u02/arch1/1_14_1200570011.dbf'</a:t>
+              <a:t>ORA-00308: cannot open archived log '/home/oracle/arch1/arch_1_14_1200574102.arc'</a:t>
             </a:r>
           </a:p>
           <a:p>
@@ -8131,7 +8131,7 @@
                 <a:latin typeface="Consolas"/>
                 <a:ea typeface="Consolas"/>
               </a:rPr>
-              <a:t>/u01/app/oracle/oradata/ORCL/redo03.log</a:t>
+              <a:t>/u01/app/oracle/oradata/orcl/redo03.log</a:t>
             </a:r>
           </a:p>
           <a:p>
@@ -10037,7 +10037,7 @@
                 <a:latin typeface="Consolas"/>
                 <a:ea typeface="Consolas"/>
               </a:rPr>
-              <a:t>  3  TO '/u02/oradata/ORCL/tbs11.dbf';</a:t>
+              <a:t>  3  TO '/u01/app/oracle/oradata/orcl/tbs11.dbf';</a:t>
             </a:r>
           </a:p>
           <a:p>
@@ -10105,7 +10105,7 @@
                 <a:latin typeface="Consolas"/>
                 <a:ea typeface="Consolas"/>
               </a:rPr>
-              <a:t>  2  AS '/u02/oradata/ORCL/tbs11.dbf';</a:t>
+              <a:t>  2  AS '/u01/app/oracle/oradata/orcl/tbs11.dbf';</a:t>
             </a:r>
           </a:p>
           <a:p>
